--- a/dist/초5/국어/문학문법매체/초5_국어_문학문법매체_02_자료출처확인.pptx
+++ b/dist/초5/국어/문학문법매체/초5_국어_문학문법매체_02_자료출처확인.pptx
@@ -121,13 +121,13 @@
   <p:extLst>
     <p:ext uri="{521415D9-36F7-43E2-AB2F-B90AF26B5E84}">
       <p14:sectionLst xmlns:p14="http://schemas.microsoft.com/office/powerpoint/2010/main">
-        <p14:section name="도입" id="{0685cda6-062a-f88e-40ee-e624f2835999}">
+        <p14:section name="도입" id="{6f1638b3-2687-e78e-edf6-cd334654f48d}">
           <p14:sldIdLst>
             <p14:sldId id="256"/>
             <p14:sldId id="257"/>
           </p14:sldIdLst>
         </p14:section>
-        <p14:section name="개념" id="{67bc570a-1273-94a2-1968-770f630de685}">
+        <p14:section name="개념" id="{c37b8055-e12a-8829-9d23-3db58c2c03ab}">
           <p14:sldIdLst>
             <p14:sldId id="258"/>
             <p14:sldId id="259"/>
@@ -136,26 +136,26 @@
             <p14:sldId id="262"/>
           </p14:sldIdLst>
         </p14:section>
-        <p14:section name="연습" id="{b3b4cd3a-b6b0-4539-5e7d-2d0a670ee4cf}">
+        <p14:section name="연습" id="{cf0ec304-7134-4e96-4493-b8c22232bd06}">
           <p14:sldIdLst>
             <p14:sldId id="263"/>
             <p14:sldId id="264"/>
             <p14:sldId id="265"/>
           </p14:sldIdLst>
         </p14:section>
-        <p14:section name="확인" id="{398f65d8-d8db-d6b3-0774-297f7032eb5e}">
+        <p14:section name="확인" id="{6afdd0b2-6bf8-818d-0343-e45d3e837d28}">
           <p14:sldIdLst>
             <p14:sldId id="266"/>
             <p14:sldId id="267"/>
             <p14:sldId id="268"/>
           </p14:sldIdLst>
         </p14:section>
-        <p14:section name="정리" id="{b4836c78-e62a-5a3d-5295-48a865c2ba9d}">
+        <p14:section name="정리" id="{1e64a201-1805-80c6-17cf-ba8b8bf874ea}">
           <p14:sldIdLst>
             <p14:sldId id="269"/>
           </p14:sldIdLst>
         </p14:section>
-        <p14:section name="보충" id="{c429e047-f47b-bfe1-761f-8ad87a4de998}">
+        <p14:section name="보충" id="{00d70129-9626-96ee-64e0-5883b5dfd2d0}">
           <p14:sldIdLst>
             <p14:sldId id="270"/>
           </p14:sldIdLst>
@@ -8825,7 +8825,7 @@
           </p:nvPr>
         </p:nvGraphicFramePr>
         <p:xfrm>
-          <a:off x="608076" y="1878076"/>
+          <a:off x="608076" y="1855216"/>
           <a:ext cx="10972800" cy="914400"/>
         </p:xfrm>
         <a:graphic>
@@ -8837,7 +8837,7 @@
                 <a:gridCol w="4389120"/>
                 <a:gridCol w="4389120"/>
               </a:tblGrid>
-              <a:tr h="472440">
+              <a:tr h="481584">
                 <a:tc>
                   <a:txBody>
                     <a:bodyPr/>
@@ -9032,7 +9032,7 @@
                   </a:tcPr>
                 </a:tc>
               </a:tr>
-              <a:tr h="472440">
+              <a:tr h="481584">
                 <a:tc>
                   <a:txBody>
                     <a:bodyPr/>
@@ -9238,7 +9238,7 @@
                   </a:tcPr>
                 </a:tc>
               </a:tr>
-              <a:tr h="472440">
+              <a:tr h="481584">
                 <a:tc>
                   <a:txBody>
                     <a:bodyPr/>
@@ -9444,7 +9444,7 @@
                   </a:tcPr>
                 </a:tc>
               </a:tr>
-              <a:tr h="472440">
+              <a:tr h="481584">
                 <a:tc>
                   <a:txBody>
                     <a:bodyPr/>
@@ -9650,7 +9650,7 @@
                   </a:tcPr>
                 </a:tc>
               </a:tr>
-              <a:tr h="472440">
+              <a:tr h="481584">
                 <a:tc>
                   <a:txBody>
                     <a:bodyPr/>
